--- a/outputs/D.P._fraude_lcbft_paiements.pptx
+++ b/outputs/D.P._fraude_lcbft_paiements.pptx
@@ -3868,7 +3868,7 @@
                 </a:solidFill>
                 <a:latin typeface="Alegreya Sans"/>
               </a:rPr>
-              <a:t>EXPÉRIENCE PROFESSIONNELLE</a:t>
+              <a:t>PRINCIPALES EXPÉRIENCES PROFESSIONNELLES</a:t>
             </a:r>
           </a:p>
           <a:p>
@@ -5012,7 +5012,7 @@
                 </a:solidFill>
                 <a:latin typeface="Alegreya Sans"/>
               </a:rPr>
-              <a:t>PROFESSIONAL EXPERIENCE</a:t>
+              <a:t>MAIN PROFESSIONAL EXPERIENCE</a:t>
             </a:r>
           </a:p>
           <a:p>
